--- a/exports/pptx/lessons/primary-module-05-dot-addition/day-02-bonds-chant.pptx
+++ b/exports/pptx/lessons/primary-module-05-dot-addition/day-02-bonds-chant.pptx
@@ -16,9 +16,11 @@
     <p:sldId id="264" r:id="rId10"/>
     <p:sldId id="265" r:id="rId11"/>
     <p:sldId id="266" r:id="rId12"/>
+    <p:sldId id="267" r:id="rId13"/>
+    <p:sldId id="268" r:id="rId14"/>
   </p:sldIdLst>
   <p:notesMasterIdLst>
-    <p:notesMasterId r:id="rId13"/>
+    <p:notesMasterId r:id="rId15"/>
   </p:notesMasterIdLst>
   <p:sldSz cx="9144000" cy="5143500"/>
   <p:notesSz cx="5143500" cy="9144000"/>
@@ -712,6 +714,182 @@
             <a:fld id="{F7021451-1387-4CA6-816F-3879F97B5CBC}" type="slidenum">
               <a:rPr lang="en-US"/>
               <a:t>11</a:t>
+            </a:fld>
+            <a:endParaRPr lang="en-US"/>
+          </a:p>
+        </p:txBody>
+      </p:sp>
+    </p:spTree>
+    <p:extLst>
+      <p:ext uri="{BB962C8B-B14F-4D97-AF65-F5344CB8AC3E}">
+        <p14:creationId xmlns:p14="http://schemas.microsoft.com/office/powerpoint/2010/main" val="1024086991"/>
+      </p:ext>
+    </p:extLst>
+  </p:cSld>
+  <p:clrMapOvr>
+    <a:masterClrMapping/>
+  </p:clrMapOvr>
+</p:notes>
+</file>
+
+<file path=ppt/notesSlides/notesSlide12.xml><?xml version="1.0" encoding="utf-8"?>
+<p:notes xmlns:a="http://schemas.openxmlformats.org/drawingml/2006/main" xmlns:r="http://schemas.openxmlformats.org/officeDocument/2006/relationships" xmlns:p="http://schemas.openxmlformats.org/presentationml/2006/main">
+  <p:cSld>
+    <p:spTree>
+      <p:nvGrpSpPr>
+        <p:cNvPr id="1" name=""/>
+        <p:cNvGrpSpPr/>
+        <p:nvPr/>
+      </p:nvGrpSpPr>
+      <p:grpSpPr>
+        <a:xfrm>
+          <a:off x="0" y="0"/>
+          <a:ext cx="0" cy="0"/>
+          <a:chOff x="0" y="0"/>
+          <a:chExt cx="0" cy="0"/>
+        </a:xfrm>
+      </p:grpSpPr>
+      <p:sp>
+        <p:nvSpPr>
+          <p:cNvPr id="2" name="Slide Image Placeholder 1"/>
+          <p:cNvSpPr>
+            <a:spLocks noGrp="1" noRot="1" noChangeAspect="1"/>
+          </p:cNvSpPr>
+          <p:nvPr>
+            <p:ph type="sldImg"/>
+          </p:nvPr>
+        </p:nvSpPr>
+        <p:spPr/>
+      </p:sp>
+      <p:sp>
+        <p:nvSpPr>
+          <p:cNvPr id="3" name="Notes Placeholder 2"/>
+          <p:cNvSpPr>
+            <a:spLocks noGrp="1"/>
+          </p:cNvSpPr>
+          <p:nvPr>
+            <p:ph type="body" idx="1"/>
+          </p:nvPr>
+        </p:nvSpPr>
+        <p:spPr/>
+        <p:txBody>
+          <a:bodyPr/>
+          <a:lstStyle/>
+          <a:p>
+            <a:r>
+              <a:rPr lang="en-US" dirty="0"/>
+              <a:t/>
+            </a:r>
+            <a:endParaRPr lang="en-US" dirty="0"/>
+          </a:p>
+        </p:txBody>
+      </p:sp>
+      <p:sp>
+        <p:nvSpPr>
+          <p:cNvPr id="4" name="Slide Number Placeholder 3"/>
+          <p:cNvSpPr>
+            <a:spLocks noGrp="1"/>
+          </p:cNvSpPr>
+          <p:nvPr>
+            <p:ph type="sldNum" sz="quarter" idx="10"/>
+          </p:nvPr>
+        </p:nvSpPr>
+        <p:spPr/>
+        <p:txBody>
+          <a:bodyPr/>
+          <a:lstStyle/>
+          <a:p>
+            <a:fld id="{F7021451-1387-4CA6-816F-3879F97B5CBC}" type="slidenum">
+              <a:rPr lang="en-US"/>
+              <a:t>12</a:t>
+            </a:fld>
+            <a:endParaRPr lang="en-US"/>
+          </a:p>
+        </p:txBody>
+      </p:sp>
+    </p:spTree>
+    <p:extLst>
+      <p:ext uri="{BB962C8B-B14F-4D97-AF65-F5344CB8AC3E}">
+        <p14:creationId xmlns:p14="http://schemas.microsoft.com/office/powerpoint/2010/main" val="1024086991"/>
+      </p:ext>
+    </p:extLst>
+  </p:cSld>
+  <p:clrMapOvr>
+    <a:masterClrMapping/>
+  </p:clrMapOvr>
+</p:notes>
+</file>
+
+<file path=ppt/notesSlides/notesSlide13.xml><?xml version="1.0" encoding="utf-8"?>
+<p:notes xmlns:a="http://schemas.openxmlformats.org/drawingml/2006/main" xmlns:r="http://schemas.openxmlformats.org/officeDocument/2006/relationships" xmlns:p="http://schemas.openxmlformats.org/presentationml/2006/main">
+  <p:cSld>
+    <p:spTree>
+      <p:nvGrpSpPr>
+        <p:cNvPr id="1" name=""/>
+        <p:cNvGrpSpPr/>
+        <p:nvPr/>
+      </p:nvGrpSpPr>
+      <p:grpSpPr>
+        <a:xfrm>
+          <a:off x="0" y="0"/>
+          <a:ext cx="0" cy="0"/>
+          <a:chOff x="0" y="0"/>
+          <a:chExt cx="0" cy="0"/>
+        </a:xfrm>
+      </p:grpSpPr>
+      <p:sp>
+        <p:nvSpPr>
+          <p:cNvPr id="2" name="Slide Image Placeholder 1"/>
+          <p:cNvSpPr>
+            <a:spLocks noGrp="1" noRot="1" noChangeAspect="1"/>
+          </p:cNvSpPr>
+          <p:nvPr>
+            <p:ph type="sldImg"/>
+          </p:nvPr>
+        </p:nvSpPr>
+        <p:spPr/>
+      </p:sp>
+      <p:sp>
+        <p:nvSpPr>
+          <p:cNvPr id="3" name="Notes Placeholder 2"/>
+          <p:cNvSpPr>
+            <a:spLocks noGrp="1"/>
+          </p:cNvSpPr>
+          <p:nvPr>
+            <p:ph type="body" idx="1"/>
+          </p:nvPr>
+        </p:nvSpPr>
+        <p:spPr/>
+        <p:txBody>
+          <a:bodyPr/>
+          <a:lstStyle/>
+          <a:p>
+            <a:r>
+              <a:rPr lang="en-US" dirty="0"/>
+              <a:t/>
+            </a:r>
+            <a:endParaRPr lang="en-US" dirty="0"/>
+          </a:p>
+        </p:txBody>
+      </p:sp>
+      <p:sp>
+        <p:nvSpPr>
+          <p:cNvPr id="4" name="Slide Number Placeholder 3"/>
+          <p:cNvSpPr>
+            <a:spLocks noGrp="1"/>
+          </p:cNvSpPr>
+          <p:nvPr>
+            <p:ph type="sldNum" sz="quarter" idx="10"/>
+          </p:nvPr>
+        </p:nvSpPr>
+        <p:spPr/>
+        <p:txBody>
+          <a:bodyPr/>
+          <a:lstStyle/>
+          <a:p>
+            <a:fld id="{F7021451-1387-4CA6-816F-3879F97B5CBC}" type="slidenum">
+              <a:rPr lang="en-US"/>
+              <a:t>13</a:t>
             </a:fld>
             <a:endParaRPr lang="en-US"/>
           </a:p>
@@ -1965,102 +2143,6 @@
         </p:nvSpPr>
         <p:spPr>
           <a:xfrm>
-            <a:off x="406301" y="1223963"/>
-            <a:ext cx="8498026" cy="274290"/>
-          </a:xfrm>
-          <a:prstGeom prst="rect">
-            <a:avLst/>
-          </a:prstGeom>
-          <a:noFill/>
-          <a:ln/>
-        </p:spPr>
-        <p:txBody>
-          <a:bodyPr wrap="square" lIns="0" tIns="0" rIns="0" bIns="0" rtlCol="0" anchor="t"/>
-          <a:lstStyle/>
-          <a:p>
-            <a:pPr algn="l" indent="0" marL="0">
-              <a:lnSpc>
-                <a:spcPts val="2160"/>
-              </a:lnSpc>
-              <a:spcBef>
-                <a:spcPts val="600"/>
-              </a:spcBef>
-              <a:spcAft>
-                <a:spcPts val="800"/>
-              </a:spcAft>
-              <a:buNone/>
-            </a:pPr>
-            <a:r>
-              <a:rPr lang="en-US" sz="1800" b="1" dirty="0">
-                <a:solidFill>
-                  <a:srgbClr val="E07A5F"/>
-                </a:solidFill>
-                <a:latin typeface="Georgia" pitchFamily="34" charset="0"/>
-                <a:ea typeface="Georgia" pitchFamily="34" charset="-122"/>
-                <a:cs typeface="Georgia" pitchFamily="34" charset="-120"/>
-              </a:rPr>
-              <a:t>Goal</a:t>
-            </a:r>
-            <a:endParaRPr lang="en-US" sz="1800" dirty="0"/>
-          </a:p>
-        </p:txBody>
-      </p:sp>
-      <p:sp>
-        <p:nvSpPr>
-          <p:cNvPr id="6" name="Text 4"/>
-          <p:cNvSpPr/>
-          <p:nvPr/>
-        </p:nvSpPr>
-        <p:spPr>
-          <a:xfrm>
-            <a:off x="406301" y="1637854"/>
-            <a:ext cx="8498026" cy="213271"/>
-          </a:xfrm>
-          <a:prstGeom prst="rect">
-            <a:avLst/>
-          </a:prstGeom>
-          <a:noFill/>
-          <a:ln/>
-        </p:spPr>
-        <p:txBody>
-          <a:bodyPr wrap="square" lIns="0" tIns="0" rIns="0" bIns="0" rtlCol="0" anchor="t"/>
-          <a:lstStyle/>
-          <a:p>
-            <a:pPr algn="l" indent="0" marL="0">
-              <a:lnSpc>
-                <a:spcPts val="1680"/>
-              </a:lnSpc>
-              <a:spcBef>
-                <a:spcPts val="300"/>
-              </a:spcBef>
-              <a:spcAft>
-                <a:spcPts val="300"/>
-              </a:spcAft>
-              <a:buNone/>
-            </a:pPr>
-            <a:r>
-              <a:rPr lang="en-US" sz="1200" dirty="0">
-                <a:solidFill>
-                  <a:srgbClr val="2C2C2C"/>
-                </a:solidFill>
-                <a:latin typeface="Verdana" pitchFamily="34" charset="0"/>
-                <a:ea typeface="Verdana" pitchFamily="34" charset="-122"/>
-                <a:cs typeface="Verdana" pitchFamily="34" charset="-120"/>
-              </a:rPr>
-              <a:t>Children memorise the five 10-pairs through chant, hand games, and repeated quick-recall.</a:t>
-            </a:r>
-            <a:endParaRPr lang="en-US" sz="1200" dirty="0"/>
-          </a:p>
-        </p:txBody>
-      </p:sp>
-      <p:sp>
-        <p:nvSpPr>
-          <p:cNvPr id="7" name="Text 5"/>
-          <p:cNvSpPr/>
-          <p:nvPr/>
-        </p:nvSpPr>
-        <p:spPr>
-          <a:xfrm>
             <a:off x="406301" y="4434929"/>
             <a:ext cx="8498026" cy="213271"/>
           </a:xfrm>
@@ -2205,7 +2287,7 @@
                 <a:ea typeface="Georgia" pitchFamily="34" charset="-122"/>
                 <a:cs typeface="Georgia" pitchFamily="34" charset="-120"/>
               </a:rPr>
-              <a:t>Differentiation</a:t>
+              <a:t>Show + chant (2 min)</a:t>
             </a:r>
             <a:endParaRPr lang="en-US" sz="1800" dirty="0"/>
           </a:p>
@@ -2219,8 +2301,8 @@
         </p:nvSpPr>
         <p:spPr>
           <a:xfrm>
-            <a:off x="634901" y="883593"/>
-            <a:ext cx="8102798" cy="525661"/>
+            <a:off x="406301" y="870942"/>
+            <a:ext cx="8498026" cy="213271"/>
           </a:xfrm>
           <a:prstGeom prst="rect">
             <a:avLst/>
@@ -2232,18 +2314,20 @@
           <a:bodyPr wrap="square" lIns="0" tIns="0" rIns="0" bIns="0" rtlCol="0" anchor="t"/>
           <a:lstStyle/>
           <a:p>
-            <a:pPr algn="l" marL="342900" indent="-342900">
-              <a:lnSpc>
-                <a:spcPts val="1620"/>
-              </a:lnSpc>
-              <a:spcAft>
-                <a:spcPts val="300"/>
-              </a:spcAft>
-              <a:buSzPct val="100000"/>
-              <a:buChar char="•"/>
-            </a:pPr>
-            <a:r>
-              <a:rPr lang="en-US" sz="1200" b="1" dirty="0">
+            <a:pPr algn="l" indent="0" marL="0">
+              <a:lnSpc>
+                <a:spcPts val="1680"/>
+              </a:lnSpc>
+              <a:spcBef>
+                <a:spcPts val="300"/>
+              </a:spcBef>
+              <a:spcAft>
+                <a:spcPts val="300"/>
+              </a:spcAft>
+              <a:buNone/>
+            </a:pPr>
+            <a:r>
+              <a:rPr lang="en-US" sz="1200" dirty="0">
                 <a:solidFill>
                   <a:srgbClr val="2C2C2C"/>
                 </a:solidFill>
@@ -2251,71 +2335,7 @@
                 <a:ea typeface="Verdana" pitchFamily="34" charset="-122"/>
                 <a:cs typeface="Verdana" pitchFamily="34" charset="-120"/>
               </a:rPr>
-              <a:t>Tier up:</a:t>
-            </a:r>
-            <a:pPr algn="l" indent="0" marL="0">
-              <a:lnSpc>
-                <a:spcPts val="1620"/>
-              </a:lnSpc>
-              <a:spcAft>
-                <a:spcPts val="300"/>
-              </a:spcAft>
-              <a:buNone/>
-            </a:pPr>
-            <a:r>
-              <a:rPr lang="en-US" sz="1200" dirty="0">
-                <a:solidFill>
-                  <a:srgbClr val="2C2C2C"/>
-                </a:solidFill>
-                <a:latin typeface="Verdana" pitchFamily="34" charset="0"/>
-                <a:ea typeface="Verdana" pitchFamily="34" charset="-122"/>
-                <a:cs typeface="Verdana" pitchFamily="34" charset="-120"/>
-              </a:rPr>
-              <a:t> Find pairs that make 11 too (5+6, 4+7).</a:t>
-            </a:r>
-            <a:endParaRPr lang="en-US" sz="1200" dirty="0"/>
-          </a:p>
-          <a:p>
-            <a:pPr algn="l" marL="342900" indent="-342900">
-              <a:lnSpc>
-                <a:spcPts val="1620"/>
-              </a:lnSpc>
-              <a:spcAft>
-                <a:spcPts val="300"/>
-              </a:spcAft>
-              <a:buSzPct val="100000"/>
-              <a:buChar char="•"/>
-            </a:pPr>
-            <a:r>
-              <a:rPr lang="en-US" sz="1200" b="1" dirty="0">
-                <a:solidFill>
-                  <a:srgbClr val="2C2C2C"/>
-                </a:solidFill>
-                <a:latin typeface="Verdana" pitchFamily="34" charset="0"/>
-                <a:ea typeface="Verdana" pitchFamily="34" charset="-122"/>
-                <a:cs typeface="Verdana" pitchFamily="34" charset="-120"/>
-              </a:rPr>
-              <a:t>Tier down:</a:t>
-            </a:r>
-            <a:pPr algn="l" indent="0" marL="0">
-              <a:lnSpc>
-                <a:spcPts val="1620"/>
-              </a:lnSpc>
-              <a:spcAft>
-                <a:spcPts val="300"/>
-              </a:spcAft>
-              <a:buNone/>
-            </a:pPr>
-            <a:r>
-              <a:rPr lang="en-US" sz="1200" dirty="0">
-                <a:solidFill>
-                  <a:srgbClr val="2C2C2C"/>
-                </a:solidFill>
-                <a:latin typeface="Verdana" pitchFamily="34" charset="0"/>
-                <a:ea typeface="Verdana" pitchFamily="34" charset="-122"/>
-                <a:cs typeface="Verdana" pitchFamily="34" charset="-120"/>
-              </a:rPr>
-              <a:t> Use a "make-10 chart" if recall is slow. Withdraw the chart by Day 5.</a:t>
+              <a:t>Close with the daily chant — bigger than ever.</a:t>
             </a:r>
             <a:endParaRPr lang="en-US" sz="1200" dirty="0"/>
           </a:p>
@@ -2473,7 +2493,7 @@
                 <a:ea typeface="Georgia" pitchFamily="34" charset="-122"/>
                 <a:cs typeface="Georgia" pitchFamily="34" charset="-120"/>
               </a:rPr>
-              <a:t>Teacher's quick notes</a:t>
+              <a:t>Homework</a:t>
             </a:r>
             <a:endParaRPr lang="en-US" sz="1800" dirty="0"/>
           </a:p>
@@ -2487,8 +2507,8 @@
         </p:nvSpPr>
         <p:spPr>
           <a:xfrm>
-            <a:off x="406301" y="870942"/>
-            <a:ext cx="8498026" cy="426541"/>
+            <a:off x="634901" y="883593"/>
+            <a:ext cx="8102798" cy="281880"/>
           </a:xfrm>
           <a:prstGeom prst="rect">
             <a:avLst/>
@@ -2500,17 +2520,15 @@
           <a:bodyPr wrap="square" lIns="0" tIns="0" rIns="0" bIns="0" rtlCol="0" anchor="t"/>
           <a:lstStyle/>
           <a:p>
-            <a:pPr algn="l" indent="0" marL="0">
-              <a:lnSpc>
-                <a:spcPts val="1680"/>
-              </a:lnSpc>
-              <a:spcBef>
-                <a:spcPts val="300"/>
-              </a:spcBef>
-              <a:spcAft>
-                <a:spcPts val="300"/>
-              </a:spcAft>
-              <a:buNone/>
+            <a:pPr algn="l" marL="342900" indent="-342900">
+              <a:lnSpc>
+                <a:spcPts val="1620"/>
+              </a:lnSpc>
+              <a:spcAft>
+                <a:spcPts val="300"/>
+              </a:spcAft>
+              <a:buSzPct val="100000"/>
+              <a:buChar char="•"/>
             </a:pPr>
             <a:r>
               <a:rPr lang="en-US" sz="1200" dirty="0">
@@ -2521,7 +2539,503 @@
                 <a:ea typeface="Verdana" pitchFamily="34" charset="-122"/>
                 <a:cs typeface="Verdana" pitchFamily="34" charset="-120"/>
               </a:rPr>
-              <a:t>– This is a memorisation day. Repetition over depth. – The hand-game pairings often surface friendship dynamics — be flexible.</a:t>
+              <a:t>At home tonight: parent or sibling holds up some fingers. You give the rest to make 10. Win 10 in a row!</a:t>
+            </a:r>
+            <a:endParaRPr lang="en-US" sz="1200" dirty="0"/>
+          </a:p>
+        </p:txBody>
+      </p:sp>
+      <p:sp>
+        <p:nvSpPr>
+          <p:cNvPr id="5" name="Text 3"/>
+          <p:cNvSpPr/>
+          <p:nvPr/>
+        </p:nvSpPr>
+        <p:spPr>
+          <a:xfrm>
+            <a:off x="406301" y="4434929"/>
+            <a:ext cx="8498026" cy="213271"/>
+          </a:xfrm>
+          <a:prstGeom prst="rect">
+            <a:avLst/>
+          </a:prstGeom>
+          <a:noFill/>
+          <a:ln/>
+        </p:spPr>
+        <p:txBody>
+          <a:bodyPr wrap="square" lIns="0" tIns="0" rIns="0" bIns="0" rtlCol="0" anchor="t"/>
+          <a:lstStyle/>
+          <a:p>
+            <a:pPr algn="l" indent="0" marL="0">
+              <a:lnSpc>
+                <a:spcPts val="1680"/>
+              </a:lnSpc>
+              <a:spcBef>
+                <a:spcPts val="300"/>
+              </a:spcBef>
+              <a:spcAft>
+                <a:spcPts val="300"/>
+              </a:spcAft>
+              <a:buNone/>
+            </a:pPr>
+            <a:r>
+              <a:rPr lang="en-US" sz="1200" dirty="0">
+                <a:solidFill>
+                  <a:srgbClr val="2C2C2C"/>
+                </a:solidFill>
+                <a:latin typeface="Verdana" pitchFamily="34" charset="0"/>
+                <a:ea typeface="Verdana" pitchFamily="34" charset="-122"/>
+                <a:cs typeface="Verdana" pitchFamily="34" charset="-120"/>
+              </a:rPr>
+              <a:t>Primary ·  · IKS Curriculum</a:t>
+            </a:r>
+            <a:endParaRPr lang="en-US" sz="1200" dirty="0"/>
+          </a:p>
+        </p:txBody>
+      </p:sp>
+    </p:spTree>
+  </p:cSld>
+  <p:clrMapOvr>
+    <a:masterClrMapping/>
+  </p:clrMapOvr>
+</p:sld>
+</file>
+
+<file path=ppt/slides/slide12.xml><?xml version="1.0" encoding="utf-8"?>
+<p:sld xmlns:a="http://schemas.openxmlformats.org/drawingml/2006/main" xmlns:r="http://schemas.openxmlformats.org/officeDocument/2006/relationships" xmlns:p="http://schemas.openxmlformats.org/presentationml/2006/main">
+  <p:cSld name="Slide 12">
+    <p:bg>
+      <p:bgPr>
+        <a:solidFill>
+          <a:srgbClr val="FAF7F2"/>
+        </a:solidFill>
+      </p:bgPr>
+    </p:bg>
+    <p:spTree>
+      <p:nvGrpSpPr>
+        <p:cNvPr id="1" name=""/>
+        <p:cNvGrpSpPr/>
+        <p:nvPr/>
+      </p:nvGrpSpPr>
+      <p:grpSpPr>
+        <a:xfrm>
+          <a:off x="0" y="0"/>
+          <a:ext cx="0" cy="0"/>
+          <a:chOff x="0" y="0"/>
+          <a:chExt cx="0" cy="0"/>
+        </a:xfrm>
+      </p:grpSpPr>
+      <p:sp>
+        <p:nvSpPr>
+          <p:cNvPr id="2" name="Text 0"/>
+          <p:cNvSpPr/>
+          <p:nvPr/>
+        </p:nvSpPr>
+        <p:spPr>
+          <a:xfrm>
+            <a:off x="0" y="0"/>
+            <a:ext cx="9144000" cy="101501"/>
+          </a:xfrm>
+          <a:prstGeom prst="rect">
+            <a:avLst/>
+          </a:prstGeom>
+          <a:solidFill>
+            <a:srgbClr val="87A96B"/>
+          </a:solidFill>
+          <a:ln/>
+        </p:spPr>
+        <p:txBody>
+          <a:bodyPr wrap="square" rtlCol="0" anchor="ctr"/>
+          <a:lstStyle/>
+          <a:p>
+            <a:pPr indent="0" marL="0">
+              <a:buNone/>
+            </a:pPr>
+            <a:endParaRPr lang="en-US" dirty="0"/>
+          </a:p>
+        </p:txBody>
+      </p:sp>
+      <p:sp>
+        <p:nvSpPr>
+          <p:cNvPr id="3" name="Text 1"/>
+          <p:cNvSpPr/>
+          <p:nvPr/>
+        </p:nvSpPr>
+        <p:spPr>
+          <a:xfrm>
+            <a:off x="406301" y="457051"/>
+            <a:ext cx="8498026" cy="274290"/>
+          </a:xfrm>
+          <a:prstGeom prst="rect">
+            <a:avLst/>
+          </a:prstGeom>
+          <a:noFill/>
+          <a:ln/>
+        </p:spPr>
+        <p:txBody>
+          <a:bodyPr wrap="square" lIns="0" tIns="0" rIns="0" bIns="0" rtlCol="0" anchor="t"/>
+          <a:lstStyle/>
+          <a:p>
+            <a:pPr algn="l" indent="0" marL="0">
+              <a:lnSpc>
+                <a:spcPts val="2160"/>
+              </a:lnSpc>
+              <a:spcBef>
+                <a:spcPts val="600"/>
+              </a:spcBef>
+              <a:spcAft>
+                <a:spcPts val="800"/>
+              </a:spcAft>
+              <a:buNone/>
+            </a:pPr>
+            <a:r>
+              <a:rPr lang="en-US" sz="1800" b="1" dirty="0">
+                <a:solidFill>
+                  <a:srgbClr val="E07A5F"/>
+                </a:solidFill>
+                <a:latin typeface="Georgia" pitchFamily="34" charset="0"/>
+                <a:ea typeface="Georgia" pitchFamily="34" charset="-122"/>
+                <a:cs typeface="Georgia" pitchFamily="34" charset="-120"/>
+              </a:rPr>
+              <a:t>Differentiation</a:t>
+            </a:r>
+            <a:endParaRPr lang="en-US" sz="1800" dirty="0"/>
+          </a:p>
+        </p:txBody>
+      </p:sp>
+      <p:sp>
+        <p:nvSpPr>
+          <p:cNvPr id="4" name="Text 2"/>
+          <p:cNvSpPr/>
+          <p:nvPr/>
+        </p:nvSpPr>
+        <p:spPr>
+          <a:xfrm>
+            <a:off x="634901" y="883593"/>
+            <a:ext cx="8102798" cy="525661"/>
+          </a:xfrm>
+          <a:prstGeom prst="rect">
+            <a:avLst/>
+          </a:prstGeom>
+          <a:noFill/>
+          <a:ln/>
+        </p:spPr>
+        <p:txBody>
+          <a:bodyPr wrap="square" lIns="0" tIns="0" rIns="0" bIns="0" rtlCol="0" anchor="t"/>
+          <a:lstStyle/>
+          <a:p>
+            <a:pPr algn="l" marL="342900" indent="-342900">
+              <a:lnSpc>
+                <a:spcPts val="1620"/>
+              </a:lnSpc>
+              <a:spcAft>
+                <a:spcPts val="300"/>
+              </a:spcAft>
+              <a:buSzPct val="100000"/>
+              <a:buChar char="•"/>
+            </a:pPr>
+            <a:r>
+              <a:rPr lang="en-US" sz="1200" b="1" dirty="0">
+                <a:solidFill>
+                  <a:srgbClr val="2C2C2C"/>
+                </a:solidFill>
+                <a:latin typeface="Verdana" pitchFamily="34" charset="0"/>
+                <a:ea typeface="Verdana" pitchFamily="34" charset="-122"/>
+                <a:cs typeface="Verdana" pitchFamily="34" charset="-120"/>
+              </a:rPr>
+              <a:t>Tier up:</a:t>
+            </a:r>
+            <a:pPr algn="l" indent="0" marL="0">
+              <a:lnSpc>
+                <a:spcPts val="1620"/>
+              </a:lnSpc>
+              <a:spcAft>
+                <a:spcPts val="300"/>
+              </a:spcAft>
+              <a:buNone/>
+            </a:pPr>
+            <a:r>
+              <a:rPr lang="en-US" sz="1200" dirty="0">
+                <a:solidFill>
+                  <a:srgbClr val="2C2C2C"/>
+                </a:solidFill>
+                <a:latin typeface="Verdana" pitchFamily="34" charset="0"/>
+                <a:ea typeface="Verdana" pitchFamily="34" charset="-122"/>
+                <a:cs typeface="Verdana" pitchFamily="34" charset="-120"/>
+              </a:rPr>
+              <a:t> Find pairs that make 11 too (5+6, 4+7).</a:t>
+            </a:r>
+            <a:endParaRPr lang="en-US" sz="1200" dirty="0"/>
+          </a:p>
+          <a:p>
+            <a:pPr algn="l" marL="342900" indent="-342900">
+              <a:lnSpc>
+                <a:spcPts val="1620"/>
+              </a:lnSpc>
+              <a:spcAft>
+                <a:spcPts val="300"/>
+              </a:spcAft>
+              <a:buSzPct val="100000"/>
+              <a:buChar char="•"/>
+            </a:pPr>
+            <a:r>
+              <a:rPr lang="en-US" sz="1200" b="1" dirty="0">
+                <a:solidFill>
+                  <a:srgbClr val="2C2C2C"/>
+                </a:solidFill>
+                <a:latin typeface="Verdana" pitchFamily="34" charset="0"/>
+                <a:ea typeface="Verdana" pitchFamily="34" charset="-122"/>
+                <a:cs typeface="Verdana" pitchFamily="34" charset="-120"/>
+              </a:rPr>
+              <a:t>Tier down:</a:t>
+            </a:r>
+            <a:pPr algn="l" indent="0" marL="0">
+              <a:lnSpc>
+                <a:spcPts val="1620"/>
+              </a:lnSpc>
+              <a:spcAft>
+                <a:spcPts val="300"/>
+              </a:spcAft>
+              <a:buNone/>
+            </a:pPr>
+            <a:r>
+              <a:rPr lang="en-US" sz="1200" dirty="0">
+                <a:solidFill>
+                  <a:srgbClr val="2C2C2C"/>
+                </a:solidFill>
+                <a:latin typeface="Verdana" pitchFamily="34" charset="0"/>
+                <a:ea typeface="Verdana" pitchFamily="34" charset="-122"/>
+                <a:cs typeface="Verdana" pitchFamily="34" charset="-120"/>
+              </a:rPr>
+              <a:t> Use a "make-10 chart" if recall is slow. Withdraw the chart by Day 5.</a:t>
+            </a:r>
+            <a:endParaRPr lang="en-US" sz="1200" dirty="0"/>
+          </a:p>
+        </p:txBody>
+      </p:sp>
+      <p:sp>
+        <p:nvSpPr>
+          <p:cNvPr id="5" name="Text 3"/>
+          <p:cNvSpPr/>
+          <p:nvPr/>
+        </p:nvSpPr>
+        <p:spPr>
+          <a:xfrm>
+            <a:off x="406301" y="4434929"/>
+            <a:ext cx="8498026" cy="213271"/>
+          </a:xfrm>
+          <a:prstGeom prst="rect">
+            <a:avLst/>
+          </a:prstGeom>
+          <a:noFill/>
+          <a:ln/>
+        </p:spPr>
+        <p:txBody>
+          <a:bodyPr wrap="square" lIns="0" tIns="0" rIns="0" bIns="0" rtlCol="0" anchor="t"/>
+          <a:lstStyle/>
+          <a:p>
+            <a:pPr algn="l" indent="0" marL="0">
+              <a:lnSpc>
+                <a:spcPts val="1680"/>
+              </a:lnSpc>
+              <a:spcBef>
+                <a:spcPts val="300"/>
+              </a:spcBef>
+              <a:spcAft>
+                <a:spcPts val="300"/>
+              </a:spcAft>
+              <a:buNone/>
+            </a:pPr>
+            <a:r>
+              <a:rPr lang="en-US" sz="1200" dirty="0">
+                <a:solidFill>
+                  <a:srgbClr val="2C2C2C"/>
+                </a:solidFill>
+                <a:latin typeface="Verdana" pitchFamily="34" charset="0"/>
+                <a:ea typeface="Verdana" pitchFamily="34" charset="-122"/>
+                <a:cs typeface="Verdana" pitchFamily="34" charset="-120"/>
+              </a:rPr>
+              <a:t>Primary ·  · IKS Curriculum</a:t>
+            </a:r>
+            <a:endParaRPr lang="en-US" sz="1200" dirty="0"/>
+          </a:p>
+        </p:txBody>
+      </p:sp>
+    </p:spTree>
+  </p:cSld>
+  <p:clrMapOvr>
+    <a:masterClrMapping/>
+  </p:clrMapOvr>
+</p:sld>
+</file>
+
+<file path=ppt/slides/slide13.xml><?xml version="1.0" encoding="utf-8"?>
+<p:sld xmlns:a="http://schemas.openxmlformats.org/drawingml/2006/main" xmlns:r="http://schemas.openxmlformats.org/officeDocument/2006/relationships" xmlns:p="http://schemas.openxmlformats.org/presentationml/2006/main">
+  <p:cSld name="Slide 13">
+    <p:bg>
+      <p:bgPr>
+        <a:solidFill>
+          <a:srgbClr val="FAF7F2"/>
+        </a:solidFill>
+      </p:bgPr>
+    </p:bg>
+    <p:spTree>
+      <p:nvGrpSpPr>
+        <p:cNvPr id="1" name=""/>
+        <p:cNvGrpSpPr/>
+        <p:nvPr/>
+      </p:nvGrpSpPr>
+      <p:grpSpPr>
+        <a:xfrm>
+          <a:off x="0" y="0"/>
+          <a:ext cx="0" cy="0"/>
+          <a:chOff x="0" y="0"/>
+          <a:chExt cx="0" cy="0"/>
+        </a:xfrm>
+      </p:grpSpPr>
+      <p:sp>
+        <p:nvSpPr>
+          <p:cNvPr id="2" name="Text 0"/>
+          <p:cNvSpPr/>
+          <p:nvPr/>
+        </p:nvSpPr>
+        <p:spPr>
+          <a:xfrm>
+            <a:off x="0" y="0"/>
+            <a:ext cx="9144000" cy="101501"/>
+          </a:xfrm>
+          <a:prstGeom prst="rect">
+            <a:avLst/>
+          </a:prstGeom>
+          <a:solidFill>
+            <a:srgbClr val="87A96B"/>
+          </a:solidFill>
+          <a:ln/>
+        </p:spPr>
+        <p:txBody>
+          <a:bodyPr wrap="square" rtlCol="0" anchor="ctr"/>
+          <a:lstStyle/>
+          <a:p>
+            <a:pPr indent="0" marL="0">
+              <a:buNone/>
+            </a:pPr>
+            <a:endParaRPr lang="en-US" dirty="0"/>
+          </a:p>
+        </p:txBody>
+      </p:sp>
+      <p:sp>
+        <p:nvSpPr>
+          <p:cNvPr id="3" name="Text 1"/>
+          <p:cNvSpPr/>
+          <p:nvPr/>
+        </p:nvSpPr>
+        <p:spPr>
+          <a:xfrm>
+            <a:off x="406301" y="457051"/>
+            <a:ext cx="8498026" cy="274290"/>
+          </a:xfrm>
+          <a:prstGeom prst="rect">
+            <a:avLst/>
+          </a:prstGeom>
+          <a:noFill/>
+          <a:ln/>
+        </p:spPr>
+        <p:txBody>
+          <a:bodyPr wrap="square" lIns="0" tIns="0" rIns="0" bIns="0" rtlCol="0" anchor="t"/>
+          <a:lstStyle/>
+          <a:p>
+            <a:pPr algn="l" indent="0" marL="0">
+              <a:lnSpc>
+                <a:spcPts val="2160"/>
+              </a:lnSpc>
+              <a:spcBef>
+                <a:spcPts val="600"/>
+              </a:spcBef>
+              <a:spcAft>
+                <a:spcPts val="800"/>
+              </a:spcAft>
+              <a:buNone/>
+            </a:pPr>
+            <a:r>
+              <a:rPr lang="en-US" sz="1800" b="1" dirty="0">
+                <a:solidFill>
+                  <a:srgbClr val="E07A5F"/>
+                </a:solidFill>
+                <a:latin typeface="Georgia" pitchFamily="34" charset="0"/>
+                <a:ea typeface="Georgia" pitchFamily="34" charset="-122"/>
+                <a:cs typeface="Georgia" pitchFamily="34" charset="-120"/>
+              </a:rPr>
+              <a:t>Teacher's quick notes</a:t>
+            </a:r>
+            <a:endParaRPr lang="en-US" sz="1800" dirty="0"/>
+          </a:p>
+        </p:txBody>
+      </p:sp>
+      <p:sp>
+        <p:nvSpPr>
+          <p:cNvPr id="4" name="Text 2"/>
+          <p:cNvSpPr/>
+          <p:nvPr/>
+        </p:nvSpPr>
+        <p:spPr>
+          <a:xfrm>
+            <a:off x="634901" y="883593"/>
+            <a:ext cx="8102798" cy="525661"/>
+          </a:xfrm>
+          <a:prstGeom prst="rect">
+            <a:avLst/>
+          </a:prstGeom>
+          <a:noFill/>
+          <a:ln/>
+        </p:spPr>
+        <p:txBody>
+          <a:bodyPr wrap="square" lIns="0" tIns="0" rIns="0" bIns="0" rtlCol="0" anchor="t"/>
+          <a:lstStyle/>
+          <a:p>
+            <a:pPr algn="l" marL="342900" indent="-342900">
+              <a:lnSpc>
+                <a:spcPts val="1620"/>
+              </a:lnSpc>
+              <a:spcAft>
+                <a:spcPts val="300"/>
+              </a:spcAft>
+              <a:buSzPct val="100000"/>
+              <a:buChar char="•"/>
+            </a:pPr>
+            <a:r>
+              <a:rPr lang="en-US" sz="1200" dirty="0">
+                <a:solidFill>
+                  <a:srgbClr val="2C2C2C"/>
+                </a:solidFill>
+                <a:latin typeface="Verdana" pitchFamily="34" charset="0"/>
+                <a:ea typeface="Verdana" pitchFamily="34" charset="-122"/>
+                <a:cs typeface="Verdana" pitchFamily="34" charset="-120"/>
+              </a:rPr>
+              <a:t>This is a memorisation day. Repetition over depth.</a:t>
+            </a:r>
+            <a:endParaRPr lang="en-US" sz="1200" dirty="0"/>
+          </a:p>
+          <a:p>
+            <a:pPr algn="l" marL="342900" indent="-342900">
+              <a:lnSpc>
+                <a:spcPts val="1620"/>
+              </a:lnSpc>
+              <a:spcAft>
+                <a:spcPts val="300"/>
+              </a:spcAft>
+              <a:buSzPct val="100000"/>
+              <a:buChar char="•"/>
+            </a:pPr>
+            <a:r>
+              <a:rPr lang="en-US" sz="1200" dirty="0">
+                <a:solidFill>
+                  <a:srgbClr val="2C2C2C"/>
+                </a:solidFill>
+                <a:latin typeface="Verdana" pitchFamily="34" charset="0"/>
+                <a:ea typeface="Verdana" pitchFamily="34" charset="-122"/>
+                <a:cs typeface="Verdana" pitchFamily="34" charset="-120"/>
+              </a:rPr>
+              <a:t>The hand-game pairings often surface friendship dynamics — be flexible.</a:t>
             </a:r>
             <a:endParaRPr lang="en-US" sz="1200" dirty="0"/>
           </a:p>
@@ -2679,7 +3193,7 @@
                 <a:ea typeface="Georgia" pitchFamily="34" charset="-122"/>
                 <a:cs typeface="Georgia" pitchFamily="34" charset="-120"/>
               </a:rPr>
-              <a:t>Materials</a:t>
+              <a:t>Goal</a:t>
             </a:r>
             <a:endParaRPr lang="en-US" sz="1800" dirty="0"/>
           </a:p>
@@ -2727,7 +3241,7 @@
                 <a:ea typeface="Verdana" pitchFamily="34" charset="-122"/>
                 <a:cs typeface="Verdana" pitchFamily="34" charset="-120"/>
               </a:rPr>
-              <a:t>– Wall poster of the 5 pairs (with pictures) – Number cards 0–9</a:t>
+              <a:t>Children memorise the five 10-pairs through chant, hand games, and repeated quick-recall.</a:t>
             </a:r>
             <a:endParaRPr lang="en-US" sz="1200" dirty="0"/>
           </a:p>
@@ -2885,7 +3399,7 @@
                 <a:ea typeface="Georgia" pitchFamily="34" charset="-122"/>
                 <a:cs typeface="Georgia" pitchFamily="34" charset="-120"/>
               </a:rPr>
-              <a:t>The flow</a:t>
+              <a:t>Materials</a:t>
             </a:r>
             <a:endParaRPr lang="en-US" sz="1800" dirty="0"/>
           </a:p>
@@ -2894,6 +3408,76 @@
       <p:sp>
         <p:nvSpPr>
           <p:cNvPr id="4" name="Text 2"/>
+          <p:cNvSpPr/>
+          <p:nvPr/>
+        </p:nvSpPr>
+        <p:spPr>
+          <a:xfrm>
+            <a:off x="634901" y="883593"/>
+            <a:ext cx="8102798" cy="525661"/>
+          </a:xfrm>
+          <a:prstGeom prst="rect">
+            <a:avLst/>
+          </a:prstGeom>
+          <a:noFill/>
+          <a:ln/>
+        </p:spPr>
+        <p:txBody>
+          <a:bodyPr wrap="square" lIns="0" tIns="0" rIns="0" bIns="0" rtlCol="0" anchor="t"/>
+          <a:lstStyle/>
+          <a:p>
+            <a:pPr algn="l" marL="342900" indent="-342900">
+              <a:lnSpc>
+                <a:spcPts val="1620"/>
+              </a:lnSpc>
+              <a:spcAft>
+                <a:spcPts val="300"/>
+              </a:spcAft>
+              <a:buSzPct val="100000"/>
+              <a:buChar char="•"/>
+            </a:pPr>
+            <a:r>
+              <a:rPr lang="en-US" sz="1200" dirty="0">
+                <a:solidFill>
+                  <a:srgbClr val="2C2C2C"/>
+                </a:solidFill>
+                <a:latin typeface="Verdana" pitchFamily="34" charset="0"/>
+                <a:ea typeface="Verdana" pitchFamily="34" charset="-122"/>
+                <a:cs typeface="Verdana" pitchFamily="34" charset="-120"/>
+              </a:rPr>
+              <a:t>Wall poster of the 5 pairs (with pictures)</a:t>
+            </a:r>
+            <a:endParaRPr lang="en-US" sz="1200" dirty="0"/>
+          </a:p>
+          <a:p>
+            <a:pPr algn="l" marL="342900" indent="-342900">
+              <a:lnSpc>
+                <a:spcPts val="1620"/>
+              </a:lnSpc>
+              <a:spcAft>
+                <a:spcPts val="300"/>
+              </a:spcAft>
+              <a:buSzPct val="100000"/>
+              <a:buChar char="•"/>
+            </a:pPr>
+            <a:r>
+              <a:rPr lang="en-US" sz="1200" dirty="0">
+                <a:solidFill>
+                  <a:srgbClr val="2C2C2C"/>
+                </a:solidFill>
+                <a:latin typeface="Verdana" pitchFamily="34" charset="0"/>
+                <a:ea typeface="Verdana" pitchFamily="34" charset="-122"/>
+                <a:cs typeface="Verdana" pitchFamily="34" charset="-120"/>
+              </a:rPr>
+              <a:t>Number cards 0–9</a:t>
+            </a:r>
+            <a:endParaRPr lang="en-US" sz="1200" dirty="0"/>
+          </a:p>
+        </p:txBody>
+      </p:sp>
+      <p:sp>
+        <p:nvSpPr>
+          <p:cNvPr id="5" name="Text 3"/>
           <p:cNvSpPr/>
           <p:nvPr/>
         </p:nvSpPr>
@@ -3043,7 +3627,7 @@
                 <a:ea typeface="Georgia" pitchFamily="34" charset="-122"/>
                 <a:cs typeface="Georgia" pitchFamily="34" charset="-120"/>
               </a:rPr>
-              <a:t>Settle + chant (5 min)</a:t>
+              <a:t>The flow</a:t>
             </a:r>
             <a:endParaRPr lang="en-US" sz="1800" dirty="0"/>
           </a:p>
@@ -3052,77 +3636,6 @@
       <p:sp>
         <p:nvSpPr>
           <p:cNvPr id="4" name="Text 2"/>
-          <p:cNvSpPr/>
-          <p:nvPr/>
-        </p:nvSpPr>
-        <p:spPr>
-          <a:xfrm>
-            <a:off x="406301" y="870942"/>
-            <a:ext cx="8498026" cy="213271"/>
-          </a:xfrm>
-          <a:prstGeom prst="rect">
-            <a:avLst/>
-          </a:prstGeom>
-          <a:noFill/>
-          <a:ln/>
-        </p:spPr>
-        <p:txBody>
-          <a:bodyPr wrap="square" lIns="0" tIns="0" rIns="0" bIns="0" rtlCol="0" anchor="t"/>
-          <a:lstStyle/>
-          <a:p>
-            <a:pPr algn="l" indent="0" marL="0">
-              <a:lnSpc>
-                <a:spcPts val="1680"/>
-              </a:lnSpc>
-              <a:spcBef>
-                <a:spcPts val="300"/>
-              </a:spcBef>
-              <a:spcAft>
-                <a:spcPts val="300"/>
-              </a:spcAft>
-              <a:buNone/>
-            </a:pPr>
-            <a:r>
-              <a:rPr lang="en-US" sz="1200" dirty="0">
-                <a:solidFill>
-                  <a:srgbClr val="2C2C2C"/>
-                </a:solidFill>
-                <a:latin typeface="Verdana" pitchFamily="34" charset="0"/>
-                <a:ea typeface="Verdana" pitchFamily="34" charset="-122"/>
-                <a:cs typeface="Verdana" pitchFamily="34" charset="-120"/>
-              </a:rPr>
-              <a:t>Daily chant: </a:t>
-            </a:r>
-            <a:pPr algn="l" indent="0" marL="0">
-              <a:lnSpc>
-                <a:spcPts val="1680"/>
-              </a:lnSpc>
-              <a:spcBef>
-                <a:spcPts val="300"/>
-              </a:spcBef>
-              <a:spcAft>
-                <a:spcPts val="300"/>
-              </a:spcAft>
-              <a:buNone/>
-            </a:pPr>
-            <a:r>
-              <a:rPr lang="en-US" sz="1200" i="1" dirty="0">
-                <a:solidFill>
-                  <a:srgbClr val="2C2C2C"/>
-                </a:solidFill>
-                <a:latin typeface="Verdana" pitchFamily="34" charset="0"/>
-                <a:ea typeface="Verdana" pitchFamily="34" charset="-122"/>
-                <a:cs typeface="Verdana" pitchFamily="34" charset="-120"/>
-              </a:rPr>
-              <a:t>"1 and 9 make 10!..."</a:t>
-            </a:r>
-            <a:endParaRPr lang="en-US" sz="1200" dirty="0"/>
-          </a:p>
-        </p:txBody>
-      </p:sp>
-      <p:sp>
-        <p:nvSpPr>
-          <p:cNvPr id="5" name="Text 3"/>
           <p:cNvSpPr/>
           <p:nvPr/>
         </p:nvSpPr>
@@ -3272,7 +3785,7 @@
                 <a:ea typeface="Georgia" pitchFamily="34" charset="-122"/>
                 <a:cs typeface="Georgia" pitchFamily="34" charset="-120"/>
               </a:rPr>
-              <a:t>The hand game (10 min)</a:t>
+              <a:t>Settle + chant (5 min)</a:t>
             </a:r>
             <a:endParaRPr lang="en-US" sz="1800" dirty="0"/>
           </a:p>
@@ -3287,7 +3800,7 @@
         <p:spPr>
           <a:xfrm>
             <a:off x="406301" y="870942"/>
-            <a:ext cx="8498026" cy="426541"/>
+            <a:ext cx="8498026" cy="213271"/>
           </a:xfrm>
           <a:prstGeom prst="rect">
             <a:avLst/>
@@ -3320,33 +3833,8 @@
                 <a:ea typeface="Verdana" pitchFamily="34" charset="-122"/>
                 <a:cs typeface="Verdana" pitchFamily="34" charset="-120"/>
               </a:rPr>
-              <a:t>– Children pair up. – Partner A holds up some fingers (1–9). – Partner B holds up the rest to make 10. – Check: do their fingers together = 10? – Swap, repeat.</a:t>
-            </a:r>
-            <a:endParaRPr lang="en-US" sz="1200" dirty="0"/>
-          </a:p>
-        </p:txBody>
-      </p:sp>
-      <p:sp>
-        <p:nvSpPr>
-          <p:cNvPr id="5" name="Text 3"/>
-          <p:cNvSpPr/>
-          <p:nvPr/>
-        </p:nvSpPr>
-        <p:spPr>
-          <a:xfrm>
-            <a:off x="406301" y="1373684"/>
-            <a:ext cx="8498026" cy="426541"/>
-          </a:xfrm>
-          <a:prstGeom prst="rect">
-            <a:avLst/>
-          </a:prstGeom>
-          <a:noFill/>
-          <a:ln/>
-        </p:spPr>
-        <p:txBody>
-          <a:bodyPr wrap="square" lIns="0" tIns="0" rIns="0" bIns="0" rtlCol="0" anchor="t"/>
-          <a:lstStyle/>
-          <a:p>
+              <a:t>Daily chant: </a:t>
+            </a:r>
             <a:pPr algn="l" indent="0" marL="0">
               <a:lnSpc>
                 <a:spcPts val="1680"/>
@@ -3360,7 +3848,7 @@
               <a:buNone/>
             </a:pPr>
             <a:r>
-              <a:rPr lang="en-US" sz="1200" dirty="0">
+              <a:rPr lang="en-US" sz="1200" i="1" dirty="0">
                 <a:solidFill>
                   <a:srgbClr val="2C2C2C"/>
                 </a:solidFill>
@@ -3368,7 +3856,7 @@
                 <a:ea typeface="Verdana" pitchFamily="34" charset="-122"/>
                 <a:cs typeface="Verdana" pitchFamily="34" charset="-120"/>
               </a:rPr>
-              <a:t>Play for 5 min. Then teacher leads class: – Teacher holds up 6 fingers. Class chorus: "FOUR!" – Teacher holds up 8. Class: "TWO!" – Mix it up. Faster.</a:t>
+              <a:t>"1 and 9 make 10!..."</a:t>
             </a:r>
             <a:endParaRPr lang="en-US" sz="1200" dirty="0"/>
           </a:p>
@@ -3376,7 +3864,7 @@
       </p:sp>
       <p:sp>
         <p:nvSpPr>
-          <p:cNvPr id="6" name="Text 4"/>
+          <p:cNvPr id="5" name="Text 3"/>
           <p:cNvSpPr/>
           <p:nvPr/>
         </p:nvSpPr>
@@ -3526,7 +4014,7 @@
                 <a:ea typeface="Georgia" pitchFamily="34" charset="-122"/>
                 <a:cs typeface="Georgia" pitchFamily="34" charset="-120"/>
               </a:rPr>
-              <a:t>Walk the pairs (10 min)</a:t>
+              <a:t>The hand game (10 min)</a:t>
             </a:r>
             <a:endParaRPr lang="en-US" sz="1800" dirty="0"/>
           </a:p>
@@ -3540,8 +4028,8 @@
         </p:nvSpPr>
         <p:spPr>
           <a:xfrm>
-            <a:off x="406301" y="870942"/>
-            <a:ext cx="8498026" cy="426541"/>
+            <a:off x="634901" y="883593"/>
+            <a:ext cx="8102798" cy="1257002"/>
           </a:xfrm>
           <a:prstGeom prst="rect">
             <a:avLst/>
@@ -3553,17 +4041,15 @@
           <a:bodyPr wrap="square" lIns="0" tIns="0" rIns="0" bIns="0" rtlCol="0" anchor="t"/>
           <a:lstStyle/>
           <a:p>
-            <a:pPr algn="l" indent="0" marL="0">
-              <a:lnSpc>
-                <a:spcPts val="1680"/>
-              </a:lnSpc>
-              <a:spcBef>
-                <a:spcPts val="300"/>
-              </a:spcBef>
-              <a:spcAft>
-                <a:spcPts val="300"/>
-              </a:spcAft>
-              <a:buNone/>
+            <a:pPr algn="l" marL="342900" indent="-342900">
+              <a:lnSpc>
+                <a:spcPts val="1620"/>
+              </a:lnSpc>
+              <a:spcAft>
+                <a:spcPts val="300"/>
+              </a:spcAft>
+              <a:buSzPct val="100000"/>
+              <a:buChar char="•"/>
             </a:pPr>
             <a:r>
               <a:rPr lang="en-US" sz="1200" dirty="0">
@@ -3574,7 +4060,103 @@
                 <a:ea typeface="Verdana" pitchFamily="34" charset="-122"/>
                 <a:cs typeface="Verdana" pitchFamily="34" charset="-120"/>
               </a:rPr>
-              <a:t>– 5 stations around the room, one per pair (1+9, 2+8, 3+7, 4+6, 5+5). – Each station has a picture + the equation. – Children walk to each station and say the pair aloud.</a:t>
+              <a:t>Children pair up.</a:t>
+            </a:r>
+            <a:endParaRPr lang="en-US" sz="1200" dirty="0"/>
+          </a:p>
+          <a:p>
+            <a:pPr algn="l" marL="342900" indent="-342900">
+              <a:lnSpc>
+                <a:spcPts val="1620"/>
+              </a:lnSpc>
+              <a:spcAft>
+                <a:spcPts val="300"/>
+              </a:spcAft>
+              <a:buSzPct val="100000"/>
+              <a:buChar char="•"/>
+            </a:pPr>
+            <a:r>
+              <a:rPr lang="en-US" sz="1200" dirty="0">
+                <a:solidFill>
+                  <a:srgbClr val="2C2C2C"/>
+                </a:solidFill>
+                <a:latin typeface="Verdana" pitchFamily="34" charset="0"/>
+                <a:ea typeface="Verdana" pitchFamily="34" charset="-122"/>
+                <a:cs typeface="Verdana" pitchFamily="34" charset="-120"/>
+              </a:rPr>
+              <a:t>Partner A holds up some fingers (1–9).</a:t>
+            </a:r>
+            <a:endParaRPr lang="en-US" sz="1200" dirty="0"/>
+          </a:p>
+          <a:p>
+            <a:pPr algn="l" marL="342900" indent="-342900">
+              <a:lnSpc>
+                <a:spcPts val="1620"/>
+              </a:lnSpc>
+              <a:spcAft>
+                <a:spcPts val="300"/>
+              </a:spcAft>
+              <a:buSzPct val="100000"/>
+              <a:buChar char="•"/>
+            </a:pPr>
+            <a:r>
+              <a:rPr lang="en-US" sz="1200" dirty="0">
+                <a:solidFill>
+                  <a:srgbClr val="2C2C2C"/>
+                </a:solidFill>
+                <a:latin typeface="Verdana" pitchFamily="34" charset="0"/>
+                <a:ea typeface="Verdana" pitchFamily="34" charset="-122"/>
+                <a:cs typeface="Verdana" pitchFamily="34" charset="-120"/>
+              </a:rPr>
+              <a:t>Partner B holds up the rest to make 10.</a:t>
+            </a:r>
+            <a:endParaRPr lang="en-US" sz="1200" dirty="0"/>
+          </a:p>
+          <a:p>
+            <a:pPr algn="l" marL="342900" indent="-342900">
+              <a:lnSpc>
+                <a:spcPts val="1620"/>
+              </a:lnSpc>
+              <a:spcAft>
+                <a:spcPts val="300"/>
+              </a:spcAft>
+              <a:buSzPct val="100000"/>
+              <a:buChar char="•"/>
+            </a:pPr>
+            <a:r>
+              <a:rPr lang="en-US" sz="1200" dirty="0">
+                <a:solidFill>
+                  <a:srgbClr val="2C2C2C"/>
+                </a:solidFill>
+                <a:latin typeface="Verdana" pitchFamily="34" charset="0"/>
+                <a:ea typeface="Verdana" pitchFamily="34" charset="-122"/>
+                <a:cs typeface="Verdana" pitchFamily="34" charset="-120"/>
+              </a:rPr>
+              <a:t>Check: do their fingers together = 10?</a:t>
+            </a:r>
+            <a:endParaRPr lang="en-US" sz="1200" dirty="0"/>
+          </a:p>
+          <a:p>
+            <a:pPr algn="l" marL="342900" indent="-342900">
+              <a:lnSpc>
+                <a:spcPts val="1620"/>
+              </a:lnSpc>
+              <a:spcAft>
+                <a:spcPts val="300"/>
+              </a:spcAft>
+              <a:buSzPct val="100000"/>
+              <a:buChar char="•"/>
+            </a:pPr>
+            <a:r>
+              <a:rPr lang="en-US" sz="1200" dirty="0">
+                <a:solidFill>
+                  <a:srgbClr val="2C2C2C"/>
+                </a:solidFill>
+                <a:latin typeface="Verdana" pitchFamily="34" charset="0"/>
+                <a:ea typeface="Verdana" pitchFamily="34" charset="-122"/>
+                <a:cs typeface="Verdana" pitchFamily="34" charset="-120"/>
+              </a:rPr>
+              <a:t>Swap, repeat.</a:t>
             </a:r>
             <a:endParaRPr lang="en-US" sz="1200" dirty="0"/>
           </a:p>
@@ -3732,7 +4314,7 @@
                 <a:ea typeface="Georgia" pitchFamily="34" charset="-122"/>
                 <a:cs typeface="Georgia" pitchFamily="34" charset="-120"/>
               </a:rPr>
-              <a:t>Quick-fire recall (8 min)</a:t>
+              <a:t>The hand game (10 min) (cont.)</a:t>
             </a:r>
             <a:endParaRPr lang="en-US" sz="1800" dirty="0"/>
           </a:p>
@@ -3780,7 +4362,7 @@
                 <a:ea typeface="Verdana" pitchFamily="34" charset="-122"/>
                 <a:cs typeface="Verdana" pitchFamily="34" charset="-120"/>
               </a:rPr>
-              <a:t>Teacher holds up a number card. Class shouts the partner.</a:t>
+              <a:t>Play for 5 min. Then teacher leads class:</a:t>
             </a:r>
             <a:endParaRPr lang="en-US" sz="1200" dirty="0"/>
           </a:p>
@@ -3794,8 +4376,8 @@
         </p:nvSpPr>
         <p:spPr>
           <a:xfrm>
-            <a:off x="406301" y="1160413"/>
-            <a:ext cx="8498026" cy="213271"/>
+            <a:off x="634901" y="1173063"/>
+            <a:ext cx="8102798" cy="769441"/>
           </a:xfrm>
           <a:prstGeom prst="rect">
             <a:avLst/>
@@ -3807,17 +4389,15 @@
           <a:bodyPr wrap="square" lIns="0" tIns="0" rIns="0" bIns="0" rtlCol="0" anchor="t"/>
           <a:lstStyle/>
           <a:p>
-            <a:pPr algn="l" indent="0" marL="0">
-              <a:lnSpc>
-                <a:spcPts val="1680"/>
-              </a:lnSpc>
-              <a:spcBef>
-                <a:spcPts val="300"/>
-              </a:spcBef>
-              <a:spcAft>
-                <a:spcPts val="300"/>
-              </a:spcAft>
-              <a:buNone/>
+            <a:pPr algn="l" marL="342900" indent="-342900">
+              <a:lnSpc>
+                <a:spcPts val="1620"/>
+              </a:lnSpc>
+              <a:spcAft>
+                <a:spcPts val="300"/>
+              </a:spcAft>
+              <a:buSzPct val="100000"/>
+              <a:buChar char="•"/>
             </a:pPr>
             <a:r>
               <a:rPr lang="en-US" sz="1200" dirty="0">
@@ -3828,32 +4408,10 @@
                 <a:ea typeface="Verdana" pitchFamily="34" charset="-122"/>
                 <a:cs typeface="Verdana" pitchFamily="34" charset="-120"/>
               </a:rPr>
-              <a:t>– 5 → "FIVE!" (5+5) – 7 → "THREE!" – 9 → "ONE!"</a:t>
+              <a:t>Teacher holds up 6 fingers. Class chorus: "FOUR!"</a:t>
             </a:r>
             <a:endParaRPr lang="en-US" sz="1200" dirty="0"/>
           </a:p>
-        </p:txBody>
-      </p:sp>
-      <p:sp>
-        <p:nvSpPr>
-          <p:cNvPr id="6" name="Text 4"/>
-          <p:cNvSpPr/>
-          <p:nvPr/>
-        </p:nvSpPr>
-        <p:spPr>
-          <a:xfrm>
-            <a:off x="634901" y="1462534"/>
-            <a:ext cx="8102798" cy="281880"/>
-          </a:xfrm>
-          <a:prstGeom prst="rect">
-            <a:avLst/>
-          </a:prstGeom>
-          <a:noFill/>
-          <a:ln/>
-        </p:spPr>
-        <p:txBody>
-          <a:bodyPr wrap="square" lIns="0" tIns="0" rIns="0" bIns="0" rtlCol="0" anchor="t"/>
-          <a:lstStyle/>
           <a:p>
             <a:pPr algn="l" marL="342900" indent="-342900">
               <a:lnSpc>
@@ -3874,44 +4432,20 @@
                 <a:ea typeface="Verdana" pitchFamily="34" charset="-122"/>
                 <a:cs typeface="Verdana" pitchFamily="34" charset="-120"/>
               </a:rPr>
-              <a:t>etc.</a:t>
+              <a:t>Teacher holds up 8. Class: "TWO!"</a:t>
             </a:r>
             <a:endParaRPr lang="en-US" sz="1200" dirty="0"/>
           </a:p>
-        </p:txBody>
-      </p:sp>
-      <p:sp>
-        <p:nvSpPr>
-          <p:cNvPr id="7" name="Text 5"/>
-          <p:cNvSpPr/>
-          <p:nvPr/>
-        </p:nvSpPr>
-        <p:spPr>
-          <a:xfrm>
-            <a:off x="406301" y="1833265"/>
-            <a:ext cx="8498026" cy="213271"/>
-          </a:xfrm>
-          <a:prstGeom prst="rect">
-            <a:avLst/>
-          </a:prstGeom>
-          <a:noFill/>
-          <a:ln/>
-        </p:spPr>
-        <p:txBody>
-          <a:bodyPr wrap="square" lIns="0" tIns="0" rIns="0" bIns="0" rtlCol="0" anchor="t"/>
-          <a:lstStyle/>
-          <a:p>
-            <a:pPr algn="l" indent="0" marL="0">
-              <a:lnSpc>
-                <a:spcPts val="1680"/>
-              </a:lnSpc>
-              <a:spcBef>
-                <a:spcPts val="300"/>
-              </a:spcBef>
-              <a:spcAft>
-                <a:spcPts val="300"/>
-              </a:spcAft>
-              <a:buNone/>
+          <a:p>
+            <a:pPr algn="l" marL="342900" indent="-342900">
+              <a:lnSpc>
+                <a:spcPts val="1620"/>
+              </a:lnSpc>
+              <a:spcAft>
+                <a:spcPts val="300"/>
+              </a:spcAft>
+              <a:buSzPct val="100000"/>
+              <a:buChar char="•"/>
             </a:pPr>
             <a:r>
               <a:rPr lang="en-US" sz="1200" dirty="0">
@@ -3922,7 +4456,7 @@
                 <a:ea typeface="Verdana" pitchFamily="34" charset="-122"/>
                 <a:cs typeface="Verdana" pitchFamily="34" charset="-120"/>
               </a:rPr>
-              <a:t>Do 20 cards in 60 seconds. Then do it again to beat the time.</a:t>
+              <a:t>Mix it up. Faster.</a:t>
             </a:r>
             <a:endParaRPr lang="en-US" sz="1200" dirty="0"/>
           </a:p>
@@ -3930,7 +4464,7 @@
       </p:sp>
       <p:sp>
         <p:nvSpPr>
-          <p:cNvPr id="8" name="Text 6"/>
+          <p:cNvPr id="6" name="Text 4"/>
           <p:cNvSpPr/>
           <p:nvPr/>
         </p:nvSpPr>
@@ -4080,7 +4614,7 @@
                 <a:ea typeface="Georgia" pitchFamily="34" charset="-122"/>
                 <a:cs typeface="Georgia" pitchFamily="34" charset="-120"/>
               </a:rPr>
-              <a:t>Show + chant (2 min)</a:t>
+              <a:t>Walk the pairs (10 min)</a:t>
             </a:r>
             <a:endParaRPr lang="en-US" sz="1800" dirty="0"/>
           </a:p>
@@ -4094,8 +4628,8 @@
         </p:nvSpPr>
         <p:spPr>
           <a:xfrm>
-            <a:off x="406301" y="870942"/>
-            <a:ext cx="8498026" cy="213271"/>
+            <a:off x="634901" y="883593"/>
+            <a:ext cx="8102798" cy="769441"/>
           </a:xfrm>
           <a:prstGeom prst="rect">
             <a:avLst/>
@@ -4107,17 +4641,15 @@
           <a:bodyPr wrap="square" lIns="0" tIns="0" rIns="0" bIns="0" rtlCol="0" anchor="t"/>
           <a:lstStyle/>
           <a:p>
-            <a:pPr algn="l" indent="0" marL="0">
-              <a:lnSpc>
-                <a:spcPts val="1680"/>
-              </a:lnSpc>
-              <a:spcBef>
-                <a:spcPts val="300"/>
-              </a:spcBef>
-              <a:spcAft>
-                <a:spcPts val="300"/>
-              </a:spcAft>
-              <a:buNone/>
+            <a:pPr algn="l" marL="342900" indent="-342900">
+              <a:lnSpc>
+                <a:spcPts val="1620"/>
+              </a:lnSpc>
+              <a:spcAft>
+                <a:spcPts val="300"/>
+              </a:spcAft>
+              <a:buSzPct val="100000"/>
+              <a:buChar char="•"/>
             </a:pPr>
             <a:r>
               <a:rPr lang="en-US" sz="1200" dirty="0">
@@ -4128,7 +4660,55 @@
                 <a:ea typeface="Verdana" pitchFamily="34" charset="-122"/>
                 <a:cs typeface="Verdana" pitchFamily="34" charset="-120"/>
               </a:rPr>
-              <a:t>Close with the daily chant — bigger than ever.</a:t>
+              <a:t>5 stations around the room, one per pair (1+9, 2+8, 3+7, 4+6, 5+5).</a:t>
+            </a:r>
+            <a:endParaRPr lang="en-US" sz="1200" dirty="0"/>
+          </a:p>
+          <a:p>
+            <a:pPr algn="l" marL="342900" indent="-342900">
+              <a:lnSpc>
+                <a:spcPts val="1620"/>
+              </a:lnSpc>
+              <a:spcAft>
+                <a:spcPts val="300"/>
+              </a:spcAft>
+              <a:buSzPct val="100000"/>
+              <a:buChar char="•"/>
+            </a:pPr>
+            <a:r>
+              <a:rPr lang="en-US" sz="1200" dirty="0">
+                <a:solidFill>
+                  <a:srgbClr val="2C2C2C"/>
+                </a:solidFill>
+                <a:latin typeface="Verdana" pitchFamily="34" charset="0"/>
+                <a:ea typeface="Verdana" pitchFamily="34" charset="-122"/>
+                <a:cs typeface="Verdana" pitchFamily="34" charset="-120"/>
+              </a:rPr>
+              <a:t>Each station has a picture + the equation.</a:t>
+            </a:r>
+            <a:endParaRPr lang="en-US" sz="1200" dirty="0"/>
+          </a:p>
+          <a:p>
+            <a:pPr algn="l" marL="342900" indent="-342900">
+              <a:lnSpc>
+                <a:spcPts val="1620"/>
+              </a:lnSpc>
+              <a:spcAft>
+                <a:spcPts val="300"/>
+              </a:spcAft>
+              <a:buSzPct val="100000"/>
+              <a:buChar char="•"/>
+            </a:pPr>
+            <a:r>
+              <a:rPr lang="en-US" sz="1200" dirty="0">
+                <a:solidFill>
+                  <a:srgbClr val="2C2C2C"/>
+                </a:solidFill>
+                <a:latin typeface="Verdana" pitchFamily="34" charset="0"/>
+                <a:ea typeface="Verdana" pitchFamily="34" charset="-122"/>
+                <a:cs typeface="Verdana" pitchFamily="34" charset="-120"/>
+              </a:rPr>
+              <a:t>Children walk to each station and say the pair aloud.</a:t>
             </a:r>
             <a:endParaRPr lang="en-US" sz="1200" dirty="0"/>
           </a:p>
@@ -4286,7 +4866,7 @@
                 <a:ea typeface="Georgia" pitchFamily="34" charset="-122"/>
                 <a:cs typeface="Georgia" pitchFamily="34" charset="-120"/>
               </a:rPr>
-              <a:t>Homework</a:t>
+              <a:t>Quick-fire recall (8 min)</a:t>
             </a:r>
             <a:endParaRPr lang="en-US" sz="1800" dirty="0"/>
           </a:p>
@@ -4334,7 +4914,7 @@
                 <a:ea typeface="Verdana" pitchFamily="34" charset="-122"/>
                 <a:cs typeface="Verdana" pitchFamily="34" charset="-120"/>
               </a:rPr>
-              <a:t>– At home tonight: parent or sibling holds up some fingers. You give the rest to make 10. Win 10 in a row!</a:t>
+              <a:t>Teacher holds up a number card. Class shouts the partner.</a:t>
             </a:r>
             <a:endParaRPr lang="en-US" sz="1200" dirty="0"/>
           </a:p>
@@ -4343,6 +4923,172 @@
       <p:sp>
         <p:nvSpPr>
           <p:cNvPr id="5" name="Text 3"/>
+          <p:cNvSpPr/>
+          <p:nvPr/>
+        </p:nvSpPr>
+        <p:spPr>
+          <a:xfrm>
+            <a:off x="634901" y="1173063"/>
+            <a:ext cx="8102798" cy="1013222"/>
+          </a:xfrm>
+          <a:prstGeom prst="rect">
+            <a:avLst/>
+          </a:prstGeom>
+          <a:noFill/>
+          <a:ln/>
+        </p:spPr>
+        <p:txBody>
+          <a:bodyPr wrap="square" lIns="0" tIns="0" rIns="0" bIns="0" rtlCol="0" anchor="t"/>
+          <a:lstStyle/>
+          <a:p>
+            <a:pPr algn="l" marL="342900" indent="-342900">
+              <a:lnSpc>
+                <a:spcPts val="1620"/>
+              </a:lnSpc>
+              <a:spcAft>
+                <a:spcPts val="300"/>
+              </a:spcAft>
+              <a:buSzPct val="100000"/>
+              <a:buChar char="•"/>
+            </a:pPr>
+            <a:r>
+              <a:rPr lang="en-US" sz="1200" dirty="0">
+                <a:solidFill>
+                  <a:srgbClr val="2C2C2C"/>
+                </a:solidFill>
+                <a:latin typeface="Verdana" pitchFamily="34" charset="0"/>
+                <a:ea typeface="Verdana" pitchFamily="34" charset="-122"/>
+                <a:cs typeface="Verdana" pitchFamily="34" charset="-120"/>
+              </a:rPr>
+              <a:t>5 → "FIVE!" (5+5)</a:t>
+            </a:r>
+            <a:endParaRPr lang="en-US" sz="1200" dirty="0"/>
+          </a:p>
+          <a:p>
+            <a:pPr algn="l" marL="342900" indent="-342900">
+              <a:lnSpc>
+                <a:spcPts val="1620"/>
+              </a:lnSpc>
+              <a:spcAft>
+                <a:spcPts val="300"/>
+              </a:spcAft>
+              <a:buSzPct val="100000"/>
+              <a:buChar char="•"/>
+            </a:pPr>
+            <a:r>
+              <a:rPr lang="en-US" sz="1200" dirty="0">
+                <a:solidFill>
+                  <a:srgbClr val="2C2C2C"/>
+                </a:solidFill>
+                <a:latin typeface="Verdana" pitchFamily="34" charset="0"/>
+                <a:ea typeface="Verdana" pitchFamily="34" charset="-122"/>
+                <a:cs typeface="Verdana" pitchFamily="34" charset="-120"/>
+              </a:rPr>
+              <a:t>7 → "THREE!"</a:t>
+            </a:r>
+            <a:endParaRPr lang="en-US" sz="1200" dirty="0"/>
+          </a:p>
+          <a:p>
+            <a:pPr algn="l" marL="342900" indent="-342900">
+              <a:lnSpc>
+                <a:spcPts val="1620"/>
+              </a:lnSpc>
+              <a:spcAft>
+                <a:spcPts val="300"/>
+              </a:spcAft>
+              <a:buSzPct val="100000"/>
+              <a:buChar char="•"/>
+            </a:pPr>
+            <a:r>
+              <a:rPr lang="en-US" sz="1200" dirty="0">
+                <a:solidFill>
+                  <a:srgbClr val="2C2C2C"/>
+                </a:solidFill>
+                <a:latin typeface="Verdana" pitchFamily="34" charset="0"/>
+                <a:ea typeface="Verdana" pitchFamily="34" charset="-122"/>
+                <a:cs typeface="Verdana" pitchFamily="34" charset="-120"/>
+              </a:rPr>
+              <a:t>9 → "ONE!"</a:t>
+            </a:r>
+            <a:endParaRPr lang="en-US" sz="1200" dirty="0"/>
+          </a:p>
+          <a:p>
+            <a:pPr algn="l" marL="342900" indent="-342900">
+              <a:lnSpc>
+                <a:spcPts val="1620"/>
+              </a:lnSpc>
+              <a:spcAft>
+                <a:spcPts val="300"/>
+              </a:spcAft>
+              <a:buSzPct val="100000"/>
+              <a:buChar char="•"/>
+            </a:pPr>
+            <a:r>
+              <a:rPr lang="en-US" sz="1200" dirty="0">
+                <a:solidFill>
+                  <a:srgbClr val="2C2C2C"/>
+                </a:solidFill>
+                <a:latin typeface="Verdana" pitchFamily="34" charset="0"/>
+                <a:ea typeface="Verdana" pitchFamily="34" charset="-122"/>
+                <a:cs typeface="Verdana" pitchFamily="34" charset="-120"/>
+              </a:rPr>
+              <a:t>etc.</a:t>
+            </a:r>
+            <a:endParaRPr lang="en-US" sz="1200" dirty="0"/>
+          </a:p>
+        </p:txBody>
+      </p:sp>
+      <p:sp>
+        <p:nvSpPr>
+          <p:cNvPr id="6" name="Text 4"/>
+          <p:cNvSpPr/>
+          <p:nvPr/>
+        </p:nvSpPr>
+        <p:spPr>
+          <a:xfrm>
+            <a:off x="406301" y="2275136"/>
+            <a:ext cx="8498026" cy="213271"/>
+          </a:xfrm>
+          <a:prstGeom prst="rect">
+            <a:avLst/>
+          </a:prstGeom>
+          <a:noFill/>
+          <a:ln/>
+        </p:spPr>
+        <p:txBody>
+          <a:bodyPr wrap="square" lIns="0" tIns="0" rIns="0" bIns="0" rtlCol="0" anchor="t"/>
+          <a:lstStyle/>
+          <a:p>
+            <a:pPr algn="l" indent="0" marL="0">
+              <a:lnSpc>
+                <a:spcPts val="1680"/>
+              </a:lnSpc>
+              <a:spcBef>
+                <a:spcPts val="300"/>
+              </a:spcBef>
+              <a:spcAft>
+                <a:spcPts val="300"/>
+              </a:spcAft>
+              <a:buNone/>
+            </a:pPr>
+            <a:r>
+              <a:rPr lang="en-US" sz="1200" dirty="0">
+                <a:solidFill>
+                  <a:srgbClr val="2C2C2C"/>
+                </a:solidFill>
+                <a:latin typeface="Verdana" pitchFamily="34" charset="0"/>
+                <a:ea typeface="Verdana" pitchFamily="34" charset="-122"/>
+                <a:cs typeface="Verdana" pitchFamily="34" charset="-120"/>
+              </a:rPr>
+              <a:t>Do 20 cards in 60 seconds. Then do it again to beat the time.</a:t>
+            </a:r>
+            <a:endParaRPr lang="en-US" sz="1200" dirty="0"/>
+          </a:p>
+        </p:txBody>
+      </p:sp>
+      <p:sp>
+        <p:nvSpPr>
+          <p:cNvPr id="7" name="Text 5"/>
           <p:cNvSpPr/>
           <p:nvPr/>
         </p:nvSpPr>
